--- a/public/fun/pack/pptx/familypro/가족소개프리미엄_03_3대가족_세이지크림.pptx
+++ b/public/fun/pack/pptx/familypro/가족소개프리미엄_03_3대가족_세이지크림.pptx
@@ -113,12 +113,12 @@
   <p:extLst>
     <p:ext uri="{521415D9-36F7-43E2-AB2F-B90AF26B5E84}">
       <p14:sectionLst xmlns:p14="http://schemas.microsoft.com/office/powerpoint/2010/main">
-        <p14:section name="시작" id="{982270CA-0276-4AC4-86E1-F016A55ACEE9}">
+        <p14:section name="시작" id="{CEAE29F9-7D71-48A4-BF19-778240E711D6}">
           <p14:sldIdLst>
             <p14:sldId id="256"/>
           </p14:sldIdLst>
         </p14:section>
-        <p14:section name="본문" id="{C15CA6E6-C134-4E75-B96A-F9F1867D4A13}">
+        <p14:section name="본문" id="{EF99B1B2-2543-453B-996C-550239EA2321}">
           <p14:sldIdLst>
             <p14:sldId id="257"/>
             <p14:sldId id="258"/>
@@ -127,7 +127,7 @@
             <p14:sldId id="261"/>
           </p14:sldIdLst>
         </p14:section>
-        <p14:section name="마무리" id="{40D5ED35-A69A-414D-B264-71FCEF61B5A9}">
+        <p14:section name="마무리" id="{9B553D3E-67F9-438B-B599-C815B5750094}">
           <p14:sldIdLst>
             <p14:sldId id="262"/>
           </p14:sldIdLst>
@@ -1545,7 +1545,7 @@
             </a:lvl1pPr>
           </a:lstStyle>
           <a:p>
-            <a:fld id="{2C90AFC6-DBC2-4BBC-B727-A80CD1F75A8B}" type="slidenum">
+            <a:fld id="{CA6EBB77-130E-49C8-A949-64B8BBC06E49}" type="slidenum">
               <a:rPr lang="en-US"/>
               <a:t>‹#›</a:t>
             </a:fld>
@@ -2150,7 +2150,7 @@
             </a:lvl1pPr>
           </a:lstStyle>
           <a:p>
-            <a:fld id="{C22F2B61-69A1-4E3C-A85E-122A3C04722F}" type="slidenum">
+            <a:fld id="{694AD0CA-89E0-4B42-B044-46E22E1BBCCE}" type="slidenum">
               <a:rPr lang="en-US"/>
               <a:t>‹#›</a:t>
             </a:fld>
@@ -2739,7 +2739,7 @@
             </a:lvl1pPr>
           </a:lstStyle>
           <a:p>
-            <a:fld id="{E6CFB179-6099-4E3F-A643-F6595A8F082C}" type="slidenum">
+            <a:fld id="{39411EA2-8733-421C-98F5-0432121FE16B}" type="slidenum">
               <a:rPr lang="en-US"/>
               <a:t>‹#›</a:t>
             </a:fld>
@@ -3542,7 +3542,7 @@
           <a:p>
             <a:r>
               <a:rPr lang="ko-KR"/>
-              <a:t>할머니가 졸업한 학교 벚나무 앞에서</a:t>
+              <a:t>할머니와 함께 벚나무 앞에서</a:t>
             </a:r>
           </a:p>
         </p:txBody>
@@ -3564,7 +3564,7 @@
           <a:p>
             <a:r>
               <a:rPr lang="ko-KR"/>
-              <a:t>3대 가족 · 0000. 00. 00</a:t>
+              <a:t>3대 가족 · 날짜 입력</a:t>
             </a:r>
           </a:p>
         </p:txBody>
@@ -4063,7 +4063,7 @@
           <a:bodyPr/>
           <a:lstStyle/>
           <a:p>
-            <a:fld id="{03506DB0-84B2-4AFE-8251-94FACDF8A54E}" type="slidenum">
+            <a:fld id="{9F0DD399-90FA-438D-83DE-42AC47AA2B19}" type="slidenum">
               <a:rPr lang="en-US"/>
               <a:t>‹#›</a:t>
             </a:fld>
@@ -5219,7 +5219,7 @@
           <a:bodyPr/>
           <a:lstStyle/>
           <a:p>
-            <a:fld id="{C1D3460B-D664-4B88-BA49-F1CFDC1133F7}" type="slidenum">
+            <a:fld id="{380E1AA1-8C96-4E2B-8ED6-9F301E0FD72A}" type="slidenum">
               <a:rPr lang="en-US"/>
               <a:t>‹#›</a:t>
             </a:fld>
@@ -6061,7 +6061,7 @@
           <a:bodyPr/>
           <a:lstStyle/>
           <a:p>
-            <a:fld id="{689CE620-BA41-469B-AE82-B7C5E0F483BC}" type="slidenum">
+            <a:fld id="{80FD0ED4-653E-4BA2-8C27-2EEDD00689D2}" type="slidenum">
               <a:rPr lang="en-US"/>
               <a:t>‹#›</a:t>
             </a:fld>
@@ -7409,7 +7409,7 @@
           <a:bodyPr/>
           <a:lstStyle/>
           <a:p>
-            <a:fld id="{FF6532A6-BD94-4D3D-BA49-ACC10A2AD9EB}" type="slidenum">
+            <a:fld id="{0ECD83BC-E4B7-4EA4-933C-E24EDA44D073}" type="slidenum">
               <a:rPr lang="en-US"/>
               <a:t>‹#›</a:t>
             </a:fld>
@@ -7497,7 +7497,7 @@
           <a:bodyPr/>
           <a:lstStyle/>
           <a:p>
-            <a:fld id="{53DC5AAA-9983-42B7-BF6C-AEC794D420DB}" type="slidenum">
+            <a:fld id="{7F4ED478-2794-4DDD-8B4D-56E61939E5FD}" type="slidenum">
               <a:rPr lang="en-US"/>
               <a:t>‹#›</a:t>
             </a:fld>
